--- a/proposal/创智汇30场活动具体方案.pptx
+++ b/proposal/创智汇30场活动具体方案.pptx
@@ -3334,7 +3334,7 @@
                 </a:solidFill>
                 <a:latin typeface="Microsoft YaHei"/>
               </a:rPr>
-              <a:t>每场≤30人　·　负责人约50%　·　我们带客 / 园区销售　·　只融合招商贴近资源，不堆全量名单</a:t>
+              <a:t>每场≤30人　·　负责人≤30%　·　我们带客 / 园区销售　·　只融合招商贴近资源，不堆全量名单</a:t>
             </a:r>
           </a:p>
         </p:txBody>
@@ -37782,7 +37782,7 @@
                 </a:solidFill>
                 <a:latin typeface="Microsoft YaHei"/>
               </a:rPr>
-              <a:t>负责人占比适度承兑约 50%（不做 100% 承诺）</a:t>
+              <a:t>负责人占比≤30%</a:t>
             </a:r>
           </a:p>
           <a:p>
